--- a/wada-tue-scoping-review/manuscripts/individual_figures/Figure_2.pptx
+++ b/wada-tue-scoping-review/manuscripts/individual_figures/Figure_2.pptx
@@ -3096,7 +3096,7 @@
         </p:nvSpPr>
         <p:spPr>
           <a:xfrm>
-            <a:off x="457200" y="182880"/>
+            <a:off x="457200" y="91440"/>
             <a:ext cx="11247120" cy="548640"/>
           </a:xfrm>
           <a:prstGeom prst="rect">
@@ -3112,46 +3112,159 @@
           <a:p>
             <a:pPr algn="ctr"/>
             <a:r>
-              <a:rPr b="1" sz="2400"/>
-              <a:t>Figure 2</a:t>
-            </a:r>
-          </a:p>
-        </p:txBody>
-      </p:sp>
-      <p:pic>
-        <p:nvPicPr>
-          <p:cNvPr id="3" name="Picture 2" descr="fig4_conceptual_framework.png"/>
-          <p:cNvPicPr>
-            <a:picLocks noChangeAspect="1"/>
-          </p:cNvPicPr>
+              <a:rPr b="1" sz="2000">
+                <a:solidFill>
+                  <a:srgbClr val="1B3A5C"/>
+                </a:solidFill>
+              </a:rPr>
+              <a:t>Figure 2. Conceptual Framework:
+The Clinical-Competition Gap in Anti-Doping</a:t>
+            </a:r>
+          </a:p>
+        </p:txBody>
+      </p:sp>
+      <p:sp>
+        <p:nvSpPr>
+          <p:cNvPr id="3" name="Rounded Rectangle 2"/>
+          <p:cNvSpPr/>
           <p:nvPr/>
-        </p:nvPicPr>
-        <p:blipFill>
-          <a:blip r:embed="rId2"/>
-          <a:stretch>
-            <a:fillRect/>
-          </a:stretch>
-        </p:blipFill>
+        </p:nvSpPr>
         <p:spPr>
           <a:xfrm>
-            <a:off x="3227482" y="914400"/>
-            <a:ext cx="5736730" cy="4572000"/>
+            <a:off x="731520" y="1097280"/>
+            <a:ext cx="4114800" cy="2011680"/>
           </a:xfrm>
-          <a:prstGeom prst="rect">
+          <a:prstGeom prst="roundRect">
             <a:avLst/>
           </a:prstGeom>
+          <a:solidFill>
+            <a:srgbClr val="E8F5E9"/>
+          </a:solidFill>
+          <a:ln w="19050">
+            <a:solidFill>
+              <a:srgbClr val="2E7D32"/>
+            </a:solidFill>
+          </a:ln>
         </p:spPr>
-      </p:pic>
-      <p:sp>
-        <p:nvSpPr>
-          <p:cNvPr id="4" name="TextBox 3"/>
+        <p:style>
+          <a:lnRef idx="1">
+            <a:schemeClr val="accent1"/>
+          </a:lnRef>
+          <a:fillRef idx="3">
+            <a:schemeClr val="accent1"/>
+          </a:fillRef>
+          <a:effectRef idx="2">
+            <a:schemeClr val="accent1"/>
+          </a:effectRef>
+          <a:fontRef idx="minor">
+            <a:schemeClr val="lt1"/>
+          </a:fontRef>
+        </p:style>
+        <p:txBody>
+          <a:bodyPr rtlCol="0" anchor="ctr" wrap="square" tIns="50800" bIns="50800"/>
+          <a:lstStyle/>
+          <a:p>
+            <a:pPr algn="ctr">
+              <a:spcBef>
+                <a:spcPts val="0"/>
+              </a:spcBef>
+              <a:spcAft>
+                <a:spcPts val="0"/>
+              </a:spcAft>
+            </a:pPr>
+            <a:r>
+              <a:rPr sz="1100" b="0">
+                <a:solidFill>
+                  <a:srgbClr val="1B5E20"/>
+                </a:solidFill>
+              </a:rPr>
+              <a:t>CLINICAL PRACTICE
+GUIDELINES
+GINA (Asthma)
+ADA (Diabetes)
+Endocrine Society
+ESC (Cardiology)
+NICE (ADHD)</a:t>
+            </a:r>
+          </a:p>
+        </p:txBody>
+      </p:sp>
+      <p:sp>
+        <p:nvSpPr>
+          <p:cNvPr id="4" name="Rounded Rectangle 3"/>
+          <p:cNvSpPr/>
+          <p:nvPr/>
+        </p:nvSpPr>
+        <p:spPr>
+          <a:xfrm>
+            <a:off x="7315200" y="1097280"/>
+            <a:ext cx="4114800" cy="2011680"/>
+          </a:xfrm>
+          <a:prstGeom prst="roundRect">
+            <a:avLst/>
+          </a:prstGeom>
+          <a:solidFill>
+            <a:srgbClr val="E3F2FD"/>
+          </a:solidFill>
+          <a:ln w="19050">
+            <a:solidFill>
+              <a:srgbClr val="1565C0"/>
+            </a:solidFill>
+          </a:ln>
+        </p:spPr>
+        <p:style>
+          <a:lnRef idx="1">
+            <a:schemeClr val="accent1"/>
+          </a:lnRef>
+          <a:fillRef idx="3">
+            <a:schemeClr val="accent1"/>
+          </a:fillRef>
+          <a:effectRef idx="2">
+            <a:schemeClr val="accent1"/>
+          </a:effectRef>
+          <a:fontRef idx="minor">
+            <a:schemeClr val="lt1"/>
+          </a:fontRef>
+        </p:style>
+        <p:txBody>
+          <a:bodyPr rtlCol="0" anchor="ctr" wrap="square" tIns="50800" bIns="50800"/>
+          <a:lstStyle/>
+          <a:p>
+            <a:pPr algn="ctr">
+              <a:spcBef>
+                <a:spcPts val="0"/>
+              </a:spcBef>
+              <a:spcAft>
+                <a:spcPts val="0"/>
+              </a:spcAft>
+            </a:pPr>
+            <a:r>
+              <a:rPr sz="1100" b="0">
+                <a:solidFill>
+                  <a:srgbClr val="0D47A1"/>
+                </a:solidFill>
+              </a:rPr>
+              <a:t>WADA ANTI-DOPING
+REGULATIONS
+Prohibited List
+ISTUE Standards
+TUE Physician Guidelines
+Monitoring Program
+ADAMS System</a:t>
+            </a:r>
+          </a:p>
+        </p:txBody>
+      </p:sp>
+      <p:sp>
+        <p:nvSpPr>
+          <p:cNvPr id="5" name="TextBox 4"/>
           <p:cNvSpPr txBox="1"/>
           <p:nvPr/>
         </p:nvSpPr>
         <p:spPr>
           <a:xfrm>
-            <a:off x="457200" y="5943600"/>
-            <a:ext cx="11247120" cy="731520"/>
+            <a:off x="3657600" y="3200400"/>
+            <a:ext cx="1828800" cy="365760"/>
           </a:xfrm>
           <a:prstGeom prst="rect">
             <a:avLst/>
@@ -3159,15 +3272,239 @@
           <a:noFill/>
         </p:spPr>
         <p:txBody>
-          <a:bodyPr wrap="square">
+          <a:bodyPr wrap="none">
             <a:spAutoFit/>
           </a:bodyPr>
           <a:lstStyle/>
           <a:p>
             <a:pPr algn="ctr"/>
             <a:r>
-              <a:rPr sz="1400" i="1"/>
-              <a:t>Figure 2. Conceptual framework: structural drivers of clinical-competition divergence.</a:t>
+              <a:rPr sz="800" i="1">
+                <a:solidFill>
+                  <a:srgbClr val="2E7D32"/>
+                </a:solidFill>
+              </a:rPr>
+              <a:t>Evidence-based
+recommendations</a:t>
+            </a:r>
+          </a:p>
+        </p:txBody>
+      </p:sp>
+      <p:sp>
+        <p:nvSpPr>
+          <p:cNvPr id="6" name="TextBox 5"/>
+          <p:cNvSpPr txBox="1"/>
+          <p:nvPr/>
+        </p:nvSpPr>
+        <p:spPr>
+          <a:xfrm>
+            <a:off x="6675120" y="3200400"/>
+            <a:ext cx="1828800" cy="365760"/>
+          </a:xfrm>
+          <a:prstGeom prst="rect">
+            <a:avLst/>
+          </a:prstGeom>
+          <a:noFill/>
+        </p:spPr>
+        <p:txBody>
+          <a:bodyPr wrap="none">
+            <a:spAutoFit/>
+          </a:bodyPr>
+          <a:lstStyle/>
+          <a:p>
+            <a:pPr algn="ctr"/>
+            <a:r>
+              <a:rPr sz="800" i="1">
+                <a:solidFill>
+                  <a:srgbClr val="1565C0"/>
+                </a:solidFill>
+              </a:rPr>
+              <a:t>Regulatory
+restrictions</a:t>
+            </a:r>
+          </a:p>
+        </p:txBody>
+      </p:sp>
+      <p:sp>
+        <p:nvSpPr>
+          <p:cNvPr id="7" name="Rounded Rectangle 6"/>
+          <p:cNvSpPr/>
+          <p:nvPr/>
+        </p:nvSpPr>
+        <p:spPr>
+          <a:xfrm>
+            <a:off x="3657600" y="3657600"/>
+            <a:ext cx="4846320" cy="1371600"/>
+          </a:xfrm>
+          <a:prstGeom prst="roundRect">
+            <a:avLst/>
+          </a:prstGeom>
+          <a:solidFill>
+            <a:srgbClr val="FFEBEE"/>
+          </a:solidFill>
+          <a:ln w="19050">
+            <a:solidFill>
+              <a:srgbClr val="C62828"/>
+            </a:solidFill>
+          </a:ln>
+        </p:spPr>
+        <p:style>
+          <a:lnRef idx="1">
+            <a:schemeClr val="accent1"/>
+          </a:lnRef>
+          <a:fillRef idx="3">
+            <a:schemeClr val="accent1"/>
+          </a:fillRef>
+          <a:effectRef idx="2">
+            <a:schemeClr val="accent1"/>
+          </a:effectRef>
+          <a:fontRef idx="minor">
+            <a:schemeClr val="lt1"/>
+          </a:fontRef>
+        </p:style>
+        <p:txBody>
+          <a:bodyPr rtlCol="0" anchor="ctr" wrap="square" tIns="50800" bIns="50800"/>
+          <a:lstStyle/>
+          <a:p>
+            <a:pPr algn="ctr">
+              <a:spcBef>
+                <a:spcPts val="0"/>
+              </a:spcBef>
+              <a:spcAft>
+                <a:spcPts val="0"/>
+              </a:spcAft>
+            </a:pPr>
+            <a:r>
+              <a:rPr sz="1200" b="1">
+                <a:solidFill>
+                  <a:srgbClr val="B71C1C"/>
+                </a:solidFill>
+              </a:rPr>
+              <a:t>CLINICAL-COMPETITION GAP
+Update timing lag | Divergent criteria
+Prohibited first-line Rx | TUE process barriers</a:t>
+            </a:r>
+          </a:p>
+        </p:txBody>
+      </p:sp>
+      <p:sp>
+        <p:nvSpPr>
+          <p:cNvPr id="8" name="Rounded Rectangle 7"/>
+          <p:cNvSpPr/>
+          <p:nvPr/>
+        </p:nvSpPr>
+        <p:spPr>
+          <a:xfrm>
+            <a:off x="2286000" y="5303520"/>
+            <a:ext cx="7589520" cy="1097280"/>
+          </a:xfrm>
+          <a:prstGeom prst="roundRect">
+            <a:avLst/>
+          </a:prstGeom>
+          <a:solidFill>
+            <a:srgbClr val="FFF3E0"/>
+          </a:solidFill>
+          <a:ln w="19050">
+            <a:solidFill>
+              <a:srgbClr val="E65100"/>
+            </a:solidFill>
+          </a:ln>
+        </p:spPr>
+        <p:style>
+          <a:lnRef idx="1">
+            <a:schemeClr val="accent1"/>
+          </a:lnRef>
+          <a:fillRef idx="3">
+            <a:schemeClr val="accent1"/>
+          </a:fillRef>
+          <a:effectRef idx="2">
+            <a:schemeClr val="accent1"/>
+          </a:effectRef>
+          <a:fontRef idx="minor">
+            <a:schemeClr val="lt1"/>
+          </a:fontRef>
+        </p:style>
+        <p:txBody>
+          <a:bodyPr rtlCol="0" anchor="ctr" wrap="square" tIns="50800" bIns="50800"/>
+          <a:lstStyle/>
+          <a:p>
+            <a:pPr algn="ctr">
+              <a:spcBef>
+                <a:spcPts val="0"/>
+              </a:spcBef>
+              <a:spcAft>
+                <a:spcPts val="0"/>
+              </a:spcAft>
+            </a:pPr>
+            <a:r>
+              <a:rPr sz="1000" b="0">
+                <a:solidFill>
+                  <a:srgbClr val="BF360C"/>
+                </a:solidFill>
+              </a:rPr>
+              <a:t>IMPACT ON ATHLETES
+Suboptimal treatment | Delayed care access | ADRV risk
+Privacy concerns | Geographic disparities | Career impact</a:t>
+            </a:r>
+          </a:p>
+        </p:txBody>
+      </p:sp>
+      <p:sp>
+        <p:nvSpPr>
+          <p:cNvPr id="9" name="Rounded Rectangle 8"/>
+          <p:cNvSpPr/>
+          <p:nvPr/>
+        </p:nvSpPr>
+        <p:spPr>
+          <a:xfrm>
+            <a:off x="2286000" y="6492240"/>
+            <a:ext cx="7589520" cy="320040"/>
+          </a:xfrm>
+          <a:prstGeom prst="roundRect">
+            <a:avLst/>
+          </a:prstGeom>
+          <a:solidFill>
+            <a:srgbClr val="E0E0E0"/>
+          </a:solidFill>
+          <a:ln w="19050">
+            <a:solidFill>
+              <a:srgbClr val="757575"/>
+            </a:solidFill>
+          </a:ln>
+        </p:spPr>
+        <p:style>
+          <a:lnRef idx="1">
+            <a:schemeClr val="accent1"/>
+          </a:lnRef>
+          <a:fillRef idx="3">
+            <a:schemeClr val="accent1"/>
+          </a:fillRef>
+          <a:effectRef idx="2">
+            <a:schemeClr val="accent1"/>
+          </a:effectRef>
+          <a:fontRef idx="minor">
+            <a:schemeClr val="lt1"/>
+          </a:fontRef>
+        </p:style>
+        <p:txBody>
+          <a:bodyPr rtlCol="0" anchor="ctr" wrap="square" tIns="50800" bIns="50800"/>
+          <a:lstStyle/>
+          <a:p>
+            <a:pPr algn="ctr">
+              <a:spcBef>
+                <a:spcPts val="0"/>
+              </a:spcBef>
+              <a:spcAft>
+                <a:spcPts val="0"/>
+              </a:spcAft>
+            </a:pPr>
+            <a:r>
+              <a:rPr sz="900" b="1">
+                <a:solidFill>
+                  <a:srgbClr val="424242"/>
+                </a:solidFill>
+              </a:rPr>
+              <a:t>RECOMMENDATIONS: Harmonize updates | Streamline TUE | Educate clinicians</a:t>
             </a:r>
           </a:p>
         </p:txBody>
